--- a/media/module7/slides.pptx
+++ b/media/module7/slides.pptx
@@ -3108,8 +3108,8 @@
         </p:nvSpPr>
         <p:spPr>
           <a:xfrm>
-            <a:off x="548640" y="2011680"/>
-            <a:ext cx="11064240" cy="2286000"/>
+            <a:off x="548640" y="1828800"/>
+            <a:ext cx="11064240" cy="2743200"/>
           </a:xfrm>
           <a:prstGeom prst="rect">
             <a:avLst/>
@@ -3118,15 +3118,22 @@
         </p:spPr>
         <p:txBody>
           <a:bodyPr wrap="square">
-            <a:spAutoFit/>
+            <a:noAutofit/>
           </a:bodyPr>
           <a:lstStyle/>
           <a:p>
             <a:pPr algn="ctr">
-              <a:defRPr sz="4400" b="1">
+              <a:lnSpc>
+                <a:spcPts val="2200"/>
+              </a:lnSpc>
+              <a:spcAft>
+                <a:spcPts val="400"/>
+              </a:spcAft>
+              <a:defRPr sz="4000" b="1">
                 <a:solidFill>
                   <a:srgbClr val="1A1A2E"/>
                 </a:solidFill>
+                <a:latin typeface="Calibri"/>
               </a:defRPr>
             </a:pPr>
             <a:r>
@@ -3135,13 +3142,17 @@
           </a:p>
           <a:p>
             <a:pPr algn="ctr">
+              <a:lnSpc>
+                <a:spcPts val="2200"/>
+              </a:lnSpc>
               <a:spcBef>
-                <a:spcPts val="1200"/>
+                <a:spcPts val="1400"/>
               </a:spcBef>
-              <a:defRPr sz="3200">
+              <a:defRPr sz="2600" b="0">
                 <a:solidFill>
                   <a:srgbClr val="333333"/>
                 </a:solidFill>
+                <a:latin typeface="Calibri"/>
               </a:defRPr>
             </a:pPr>
             <a:r>
@@ -3167,16 +3178,20 @@
           <a:noFill/>
         </p:spPr>
         <p:txBody>
-          <a:bodyPr wrap="none">
-            <a:spAutoFit/>
+          <a:bodyPr wrap="square">
+            <a:noAutofit/>
           </a:bodyPr>
           <a:lstStyle/>
           <a:p>
             <a:pPr algn="r">
-              <a:defRPr sz="1000">
+              <a:lnSpc>
+                <a:spcPts val="2200"/>
+              </a:lnSpc>
+              <a:defRPr sz="1000" b="0">
                 <a:solidFill>
                   <a:srgbClr val="666666"/>
                 </a:solidFill>
+                <a:latin typeface="Calibri"/>
               </a:defRPr>
             </a:pPr>
             <a:r>
@@ -3211,8 +3226,8 @@
         </p:nvSpPr>
         <p:spPr>
           <a:xfrm>
-            <a:off x="548640" y="457200"/>
-            <a:ext cx="11064240" cy="731520"/>
+            <a:off x="548640" y="411480"/>
+            <a:ext cx="11064240" cy="777240"/>
           </a:xfrm>
           <a:prstGeom prst="rect">
             <a:avLst/>
@@ -3220,16 +3235,20 @@
           <a:noFill/>
         </p:spPr>
         <p:txBody>
-          <a:bodyPr wrap="none">
-            <a:spAutoFit/>
+          <a:bodyPr wrap="square">
+            <a:noAutofit/>
           </a:bodyPr>
           <a:lstStyle/>
           <a:p>
             <a:pPr>
-              <a:defRPr sz="3200" b="1">
+              <a:lnSpc>
+                <a:spcPts val="2200"/>
+              </a:lnSpc>
+              <a:defRPr sz="2800" b="1">
                 <a:solidFill>
                   <a:srgbClr val="1A1A2E"/>
                 </a:solidFill>
+                <a:latin typeface="Calibri"/>
               </a:defRPr>
             </a:pPr>
             <a:r>
@@ -3246,22 +3265,33 @@
         </p:nvSpPr>
         <p:spPr>
           <a:xfrm>
-            <a:off x="548640" y="1143000"/>
-            <a:ext cx="11064240" cy="548640"/>
+            <a:off x="548640" y="1051560"/>
+            <a:ext cx="11064240" cy="914400"/>
           </a:xfrm>
           <a:prstGeom prst="rect">
             <a:avLst/>
           </a:prstGeom>
-          <a:noFill/>
-        </p:spPr>
-        <p:txBody>
-          <a:bodyPr wrap="none">
-            <a:spAutoFit/>
+          <a:solidFill>
+            <a:srgbClr val="F4F4F4"/>
+          </a:solidFill>
+        </p:spPr>
+        <p:txBody>
+          <a:bodyPr wrap="square">
+            <a:noAutofit/>
           </a:bodyPr>
           <a:lstStyle/>
           <a:p>
             <a:pPr>
-              <a:defRPr sz="1400">
+              <a:lnSpc>
+                <a:spcPts val="2200"/>
+              </a:lnSpc>
+              <a:spcAft>
+                <a:spcPts val="200"/>
+              </a:spcAft>
+              <a:defRPr sz="2000" b="0">
+                <a:solidFill>
+                  <a:srgbClr val="333333"/>
+                </a:solidFill>
                 <a:latin typeface="Consolas"/>
               </a:defRPr>
             </a:pPr>
@@ -3287,8 +3317,8 @@
         </p:blipFill>
         <p:spPr>
           <a:xfrm>
-            <a:off x="548640" y="1828800"/>
-            <a:ext cx="11064240" cy="3840480"/>
+            <a:off x="548640" y="1965960"/>
+            <a:ext cx="7071358" cy="3977639"/>
           </a:xfrm>
           <a:prstGeom prst="rect">
             <a:avLst/>
@@ -3312,16 +3342,20 @@
           <a:noFill/>
         </p:spPr>
         <p:txBody>
-          <a:bodyPr wrap="none">
-            <a:spAutoFit/>
+          <a:bodyPr wrap="square">
+            <a:noAutofit/>
           </a:bodyPr>
           <a:lstStyle/>
           <a:p>
             <a:pPr algn="r">
-              <a:defRPr sz="1000">
+              <a:lnSpc>
+                <a:spcPts val="2200"/>
+              </a:lnSpc>
+              <a:defRPr sz="1000" b="0">
                 <a:solidFill>
                   <a:srgbClr val="666666"/>
                 </a:solidFill>
+                <a:latin typeface="Calibri"/>
               </a:defRPr>
             </a:pPr>
             <a:r>
@@ -3365,13 +3399,21 @@
           <a:noFill/>
         </p:spPr>
         <p:txBody>
-          <a:bodyPr wrap="none">
-            <a:spAutoFit/>
+          <a:bodyPr wrap="square">
+            <a:noAutofit/>
           </a:bodyPr>
           <a:lstStyle/>
           <a:p>
             <a:pPr algn="ctr">
-              <a:defRPr sz="4000" b="1"/>
+              <a:lnSpc>
+                <a:spcPts val="2200"/>
+              </a:lnSpc>
+              <a:defRPr sz="3600" b="1">
+                <a:solidFill>
+                  <a:srgbClr val="1A1A2E"/>
+                </a:solidFill>
+                <a:latin typeface="Calibri"/>
+              </a:defRPr>
             </a:pPr>
             <a:r>
               <a:t>Practice</a:t>
@@ -3396,16 +3438,20 @@
           <a:noFill/>
         </p:spPr>
         <p:txBody>
-          <a:bodyPr wrap="none">
-            <a:spAutoFit/>
+          <a:bodyPr wrap="square">
+            <a:noAutofit/>
           </a:bodyPr>
           <a:lstStyle/>
           <a:p>
             <a:pPr algn="r">
-              <a:defRPr sz="1000">
+              <a:lnSpc>
+                <a:spcPts val="2200"/>
+              </a:lnSpc>
+              <a:defRPr sz="1000" b="0">
                 <a:solidFill>
                   <a:srgbClr val="666666"/>
                 </a:solidFill>
+                <a:latin typeface="Calibri"/>
               </a:defRPr>
             </a:pPr>
             <a:r>
@@ -3440,8 +3486,8 @@
         </p:nvSpPr>
         <p:spPr>
           <a:xfrm>
-            <a:off x="548640" y="457200"/>
-            <a:ext cx="11064240" cy="731520"/>
+            <a:off x="548640" y="411480"/>
+            <a:ext cx="11064240" cy="777240"/>
           </a:xfrm>
           <a:prstGeom prst="rect">
             <a:avLst/>
@@ -3449,16 +3495,20 @@
           <a:noFill/>
         </p:spPr>
         <p:txBody>
-          <a:bodyPr wrap="none">
-            <a:spAutoFit/>
+          <a:bodyPr wrap="square">
+            <a:noAutofit/>
           </a:bodyPr>
           <a:lstStyle/>
           <a:p>
             <a:pPr>
-              <a:defRPr sz="3200" b="1">
+              <a:lnSpc>
+                <a:spcPts val="2200"/>
+              </a:lnSpc>
+              <a:defRPr sz="2800" b="1">
                 <a:solidFill>
                   <a:srgbClr val="1A1A2E"/>
                 </a:solidFill>
+                <a:latin typeface="Calibri"/>
               </a:defRPr>
             </a:pPr>
             <a:r>
@@ -3475,8 +3525,8 @@
         </p:nvSpPr>
         <p:spPr>
           <a:xfrm>
-            <a:off x="548640" y="1280160"/>
-            <a:ext cx="11064240" cy="4754880"/>
+            <a:off x="548640" y="1234440"/>
+            <a:ext cx="11064240" cy="4937760"/>
           </a:xfrm>
           <a:prstGeom prst="rect">
             <a:avLst/>
@@ -3485,52 +3535,64 @@
         </p:spPr>
         <p:txBody>
           <a:bodyPr wrap="square">
-            <a:spAutoFit/>
+            <a:noAutofit/>
           </a:bodyPr>
           <a:lstStyle/>
           <a:p>
             <a:pPr>
+              <a:lnSpc>
+                <a:spcPts val="2200"/>
+              </a:lnSpc>
               <a:spcAft>
-                <a:spcPts val="800"/>
+                <a:spcPts val="1000"/>
               </a:spcAft>
-              <a:defRPr sz="2000">
+              <a:defRPr sz="2000" b="0">
                 <a:solidFill>
                   <a:srgbClr val="333333"/>
                 </a:solidFill>
+                <a:latin typeface="Calibri"/>
               </a:defRPr>
             </a:pPr>
             <a:r>
-              <a:t>Create branch in git_demo</a:t>
+              <a:t>• Create branch in git_demo</a:t>
             </a:r>
           </a:p>
           <a:p>
             <a:pPr>
+              <a:lnSpc>
+                <a:spcPts val="2200"/>
+              </a:lnSpc>
               <a:spcAft>
-                <a:spcPts val="800"/>
+                <a:spcPts val="1000"/>
               </a:spcAft>
-              <a:defRPr sz="2000">
+              <a:defRPr sz="2000" b="0">
                 <a:solidFill>
                   <a:srgbClr val="333333"/>
                 </a:solidFill>
+                <a:latin typeface="Calibri"/>
               </a:defRPr>
             </a:pPr>
             <a:r>
-              <a:t>Resolve sample_conflict.txt on paper</a:t>
+              <a:t>• Resolve sample_conflict.txt on paper</a:t>
             </a:r>
           </a:p>
           <a:p>
             <a:pPr>
+              <a:lnSpc>
+                <a:spcPts val="2200"/>
+              </a:lnSpc>
               <a:spcAft>
-                <a:spcPts val="800"/>
+                <a:spcPts val="1000"/>
               </a:spcAft>
-              <a:defRPr sz="2000">
+              <a:defRPr sz="2000" b="0">
                 <a:solidFill>
                   <a:srgbClr val="333333"/>
                 </a:solidFill>
+                <a:latin typeface="Calibri"/>
               </a:defRPr>
             </a:pPr>
             <a:r>
-              <a:t>Try git submodule update --init</a:t>
+              <a:t>• Try git submodule update --init</a:t>
             </a:r>
           </a:p>
         </p:txBody>
@@ -3552,16 +3614,20 @@
           <a:noFill/>
         </p:spPr>
         <p:txBody>
-          <a:bodyPr wrap="none">
-            <a:spAutoFit/>
+          <a:bodyPr wrap="square">
+            <a:noAutofit/>
           </a:bodyPr>
           <a:lstStyle/>
           <a:p>
             <a:pPr algn="r">
-              <a:defRPr sz="1000">
+              <a:lnSpc>
+                <a:spcPts val="2200"/>
+              </a:lnSpc>
+              <a:defRPr sz="1000" b="0">
                 <a:solidFill>
                   <a:srgbClr val="666666"/>
                 </a:solidFill>
+                <a:latin typeface="Calibri"/>
               </a:defRPr>
             </a:pPr>
             <a:r>
@@ -3596,8 +3662,8 @@
         </p:nvSpPr>
         <p:spPr>
           <a:xfrm>
-            <a:off x="548640" y="457200"/>
-            <a:ext cx="11064240" cy="731520"/>
+            <a:off x="548640" y="411480"/>
+            <a:ext cx="11064240" cy="777240"/>
           </a:xfrm>
           <a:prstGeom prst="rect">
             <a:avLst/>
@@ -3605,16 +3671,20 @@
           <a:noFill/>
         </p:spPr>
         <p:txBody>
-          <a:bodyPr wrap="none">
-            <a:spAutoFit/>
+          <a:bodyPr wrap="square">
+            <a:noAutofit/>
           </a:bodyPr>
           <a:lstStyle/>
           <a:p>
             <a:pPr>
-              <a:defRPr sz="3200" b="1">
+              <a:lnSpc>
+                <a:spcPts val="2200"/>
+              </a:lnSpc>
+              <a:defRPr sz="2800" b="1">
                 <a:solidFill>
                   <a:srgbClr val="1A1A2E"/>
                 </a:solidFill>
+                <a:latin typeface="Calibri"/>
               </a:defRPr>
             </a:pPr>
             <a:r>
@@ -3631,8 +3701,8 @@
         </p:nvSpPr>
         <p:spPr>
           <a:xfrm>
-            <a:off x="548640" y="1280160"/>
-            <a:ext cx="11064240" cy="4754880"/>
+            <a:off x="548640" y="1234440"/>
+            <a:ext cx="11064240" cy="4937760"/>
           </a:xfrm>
           <a:prstGeom prst="rect">
             <a:avLst/>
@@ -3641,67 +3711,83 @@
         </p:spPr>
         <p:txBody>
           <a:bodyPr wrap="square">
-            <a:spAutoFit/>
+            <a:noAutofit/>
           </a:bodyPr>
           <a:lstStyle/>
           <a:p>
             <a:pPr>
+              <a:lnSpc>
+                <a:spcPts val="2200"/>
+              </a:lnSpc>
               <a:spcAft>
-                <a:spcPts val="800"/>
+                <a:spcPts val="1000"/>
               </a:spcAft>
-              <a:defRPr sz="2000">
+              <a:defRPr sz="2000" b="0">
                 <a:solidFill>
                   <a:srgbClr val="333333"/>
                 </a:solidFill>
+                <a:latin typeface="Calibri"/>
               </a:defRPr>
             </a:pPr>
             <a:r>
-              <a:t>Branching and merging</a:t>
+              <a:t>• Branching and merging</a:t>
             </a:r>
           </a:p>
           <a:p>
             <a:pPr>
+              <a:lnSpc>
+                <a:spcPts val="2200"/>
+              </a:lnSpc>
               <a:spcAft>
-                <a:spcPts val="800"/>
+                <a:spcPts val="1000"/>
               </a:spcAft>
-              <a:defRPr sz="2000">
+              <a:defRPr sz="2000" b="0">
                 <a:solidFill>
                   <a:srgbClr val="333333"/>
                 </a:solidFill>
+                <a:latin typeface="Calibri"/>
               </a:defRPr>
             </a:pPr>
             <a:r>
-              <a:t>Conflicts and submodules</a:t>
+              <a:t>• Conflicts and submodules</a:t>
             </a:r>
           </a:p>
           <a:p>
             <a:pPr>
+              <a:lnSpc>
+                <a:spcPts val="2200"/>
+              </a:lnSpc>
               <a:spcAft>
-                <a:spcPts val="800"/>
+                <a:spcPts val="1000"/>
               </a:spcAft>
-              <a:defRPr sz="2000">
+              <a:defRPr sz="2000" b="0">
                 <a:solidFill>
                   <a:srgbClr val="333333"/>
                 </a:solidFill>
+                <a:latin typeface="Calibri"/>
               </a:defRPr>
             </a:pPr>
             <a:r>
-              <a:t>Next: Module 8 — end-to-end workflow</a:t>
+              <a:t>• Next: Module 8 — end-to-end workflow</a:t>
             </a:r>
           </a:p>
           <a:p>
             <a:pPr>
+              <a:lnSpc>
+                <a:spcPts val="2200"/>
+              </a:lnSpc>
               <a:spcAft>
-                <a:spcPts val="800"/>
+                <a:spcPts val="1000"/>
               </a:spcAft>
-              <a:defRPr sz="2000">
+              <a:defRPr sz="2000" b="0">
                 <a:solidFill>
                   <a:srgbClr val="333333"/>
                 </a:solidFill>
+                <a:latin typeface="Calibri"/>
               </a:defRPr>
             </a:pPr>
             <a:r>
-              <a:t>Next: Module 8: End-to-End Project Workflow</a:t>
+              <a:t>• Next: Module 8: End-to-End Project Workflow</a:t>
             </a:r>
           </a:p>
         </p:txBody>
@@ -3723,16 +3809,20 @@
           <a:noFill/>
         </p:spPr>
         <p:txBody>
-          <a:bodyPr wrap="none">
-            <a:spAutoFit/>
+          <a:bodyPr wrap="square">
+            <a:noAutofit/>
           </a:bodyPr>
           <a:lstStyle/>
           <a:p>
             <a:pPr algn="r">
-              <a:defRPr sz="1000">
+              <a:lnSpc>
+                <a:spcPts val="2200"/>
+              </a:lnSpc>
+              <a:defRPr sz="1000" b="0">
                 <a:solidFill>
                   <a:srgbClr val="666666"/>
                 </a:solidFill>
+                <a:latin typeface="Calibri"/>
               </a:defRPr>
             </a:pPr>
             <a:r>
@@ -3767,8 +3857,8 @@
         </p:nvSpPr>
         <p:spPr>
           <a:xfrm>
-            <a:off x="548640" y="457200"/>
-            <a:ext cx="11064240" cy="731520"/>
+            <a:off x="548640" y="411480"/>
+            <a:ext cx="11064240" cy="777240"/>
           </a:xfrm>
           <a:prstGeom prst="rect">
             <a:avLst/>
@@ -3776,16 +3866,20 @@
           <a:noFill/>
         </p:spPr>
         <p:txBody>
-          <a:bodyPr wrap="none">
-            <a:spAutoFit/>
+          <a:bodyPr wrap="square">
+            <a:noAutofit/>
           </a:bodyPr>
           <a:lstStyle/>
           <a:p>
             <a:pPr>
-              <a:defRPr sz="3200" b="1">
+              <a:lnSpc>
+                <a:spcPts val="2200"/>
+              </a:lnSpc>
+              <a:defRPr sz="2800" b="1">
                 <a:solidFill>
                   <a:srgbClr val="1A1A2E"/>
                 </a:solidFill>
+                <a:latin typeface="Calibri"/>
               </a:defRPr>
             </a:pPr>
             <a:r>
@@ -3802,8 +3896,8 @@
         </p:nvSpPr>
         <p:spPr>
           <a:xfrm>
-            <a:off x="548640" y="1280160"/>
-            <a:ext cx="11064240" cy="4754880"/>
+            <a:off x="548640" y="1234440"/>
+            <a:ext cx="11064240" cy="4937760"/>
           </a:xfrm>
           <a:prstGeom prst="rect">
             <a:avLst/>
@@ -3812,67 +3906,83 @@
         </p:spPr>
         <p:txBody>
           <a:bodyPr wrap="square">
-            <a:spAutoFit/>
+            <a:noAutofit/>
           </a:bodyPr>
           <a:lstStyle/>
           <a:p>
             <a:pPr>
+              <a:lnSpc>
+                <a:spcPts val="2200"/>
+              </a:lnSpc>
               <a:spcAft>
-                <a:spcPts val="800"/>
+                <a:spcPts val="1000"/>
               </a:spcAft>
-              <a:defRPr sz="2000">
+              <a:defRPr sz="2000" b="0">
                 <a:solidFill>
                   <a:srgbClr val="333333"/>
                 </a:solidFill>
+                <a:latin typeface="Calibri"/>
               </a:defRPr>
             </a:pPr>
             <a:r>
-              <a:t>Create and switch feature branches</a:t>
+              <a:t>• Create and switch feature branches</a:t>
             </a:r>
           </a:p>
           <a:p>
             <a:pPr>
+              <a:lnSpc>
+                <a:spcPts val="2200"/>
+              </a:lnSpc>
               <a:spcAft>
-                <a:spcPts val="800"/>
+                <a:spcPts val="1000"/>
               </a:spcAft>
-              <a:defRPr sz="2000">
+              <a:defRPr sz="2000" b="0">
                 <a:solidFill>
                   <a:srgbClr val="333333"/>
                 </a:solidFill>
+                <a:latin typeface="Calibri"/>
               </a:defRPr>
             </a:pPr>
             <a:r>
-              <a:t>Merge branches and resolve conflicts</a:t>
+              <a:t>• Merge branches and resolve conflicts</a:t>
             </a:r>
           </a:p>
           <a:p>
             <a:pPr>
+              <a:lnSpc>
+                <a:spcPts val="2200"/>
+              </a:lnSpc>
               <a:spcAft>
-                <a:spcPts val="800"/>
+                <a:spcPts val="1000"/>
               </a:spcAft>
-              <a:defRPr sz="2000">
+              <a:defRPr sz="2000" b="0">
                 <a:solidFill>
                   <a:srgbClr val="333333"/>
                 </a:solidFill>
+                <a:latin typeface="Calibri"/>
               </a:defRPr>
             </a:pPr>
             <a:r>
-              <a:t>Understand submodules for shared IP</a:t>
+              <a:t>• Understand submodules for shared IP</a:t>
             </a:r>
           </a:p>
           <a:p>
             <a:pPr>
+              <a:lnSpc>
+                <a:spcPts val="2200"/>
+              </a:lnSpc>
               <a:spcAft>
-                <a:spcPts val="800"/>
+                <a:spcPts val="1000"/>
               </a:spcAft>
-              <a:defRPr sz="2000">
+              <a:defRPr sz="2000" b="0">
                 <a:solidFill>
                   <a:srgbClr val="333333"/>
                 </a:solidFill>
+                <a:latin typeface="Calibri"/>
               </a:defRPr>
             </a:pPr>
             <a:r>
-              <a:t>Use git blame and bisect conceptually</a:t>
+              <a:t>• Use git blame and bisect conceptually</a:t>
             </a:r>
           </a:p>
         </p:txBody>
@@ -3894,16 +4004,20 @@
           <a:noFill/>
         </p:spPr>
         <p:txBody>
-          <a:bodyPr wrap="none">
-            <a:spAutoFit/>
+          <a:bodyPr wrap="square">
+            <a:noAutofit/>
           </a:bodyPr>
           <a:lstStyle/>
           <a:p>
             <a:pPr algn="r">
-              <a:defRPr sz="1000">
+              <a:lnSpc>
+                <a:spcPts val="2200"/>
+              </a:lnSpc>
+              <a:defRPr sz="1000" b="0">
                 <a:solidFill>
                   <a:srgbClr val="666666"/>
                 </a:solidFill>
+                <a:latin typeface="Calibri"/>
               </a:defRPr>
             </a:pPr>
             <a:r>
@@ -3938,8 +4052,8 @@
         </p:nvSpPr>
         <p:spPr>
           <a:xfrm>
-            <a:off x="548640" y="457200"/>
-            <a:ext cx="11064240" cy="731520"/>
+            <a:off x="548640" y="411480"/>
+            <a:ext cx="11064240" cy="777240"/>
           </a:xfrm>
           <a:prstGeom prst="rect">
             <a:avLst/>
@@ -3947,16 +4061,20 @@
           <a:noFill/>
         </p:spPr>
         <p:txBody>
-          <a:bodyPr wrap="none">
-            <a:spAutoFit/>
+          <a:bodyPr wrap="square">
+            <a:noAutofit/>
           </a:bodyPr>
           <a:lstStyle/>
           <a:p>
             <a:pPr>
-              <a:defRPr sz="3200" b="1">
+              <a:lnSpc>
+                <a:spcPts val="2200"/>
+              </a:lnSpc>
+              <a:defRPr sz="2800" b="1">
                 <a:solidFill>
                   <a:srgbClr val="1A1A2E"/>
                 </a:solidFill>
+                <a:latin typeface="Calibri"/>
               </a:defRPr>
             </a:pPr>
             <a:r>
@@ -3973,8 +4091,8 @@
         </p:nvSpPr>
         <p:spPr>
           <a:xfrm>
-            <a:off x="548640" y="1280160"/>
-            <a:ext cx="11064240" cy="4754880"/>
+            <a:off x="548640" y="1234440"/>
+            <a:ext cx="11064240" cy="4937760"/>
           </a:xfrm>
           <a:prstGeom prst="rect">
             <a:avLst/>
@@ -3983,22 +4101,26 @@
         </p:spPr>
         <p:txBody>
           <a:bodyPr wrap="square">
-            <a:spAutoFit/>
+            <a:noAutofit/>
           </a:bodyPr>
           <a:lstStyle/>
           <a:p>
             <a:pPr>
+              <a:lnSpc>
+                <a:spcPts val="2200"/>
+              </a:lnSpc>
               <a:spcAft>
-                <a:spcPts val="800"/>
+                <a:spcPts val="1000"/>
               </a:spcAft>
-              <a:defRPr sz="2000">
+              <a:defRPr sz="2000" b="0">
                 <a:solidFill>
                   <a:srgbClr val="333333"/>
                 </a:solidFill>
+                <a:latin typeface="Calibri"/>
               </a:defRPr>
             </a:pPr>
             <a:r>
-              <a:t>Module 6 (add, commit, push)</a:t>
+              <a:t>• Module 6 (add, commit, push)</a:t>
             </a:r>
           </a:p>
         </p:txBody>
@@ -4020,16 +4142,20 @@
           <a:noFill/>
         </p:spPr>
         <p:txBody>
-          <a:bodyPr wrap="none">
-            <a:spAutoFit/>
+          <a:bodyPr wrap="square">
+            <a:noAutofit/>
           </a:bodyPr>
           <a:lstStyle/>
           <a:p>
             <a:pPr algn="r">
-              <a:defRPr sz="1000">
+              <a:lnSpc>
+                <a:spcPts val="2200"/>
+              </a:lnSpc>
+              <a:defRPr sz="1000" b="0">
                 <a:solidFill>
                   <a:srgbClr val="666666"/>
                 </a:solidFill>
+                <a:latin typeface="Calibri"/>
               </a:defRPr>
             </a:pPr>
             <a:r>
@@ -4064,8 +4190,8 @@
         </p:nvSpPr>
         <p:spPr>
           <a:xfrm>
-            <a:off x="548640" y="457200"/>
-            <a:ext cx="11064240" cy="731520"/>
+            <a:off x="548640" y="411480"/>
+            <a:ext cx="11064240" cy="777240"/>
           </a:xfrm>
           <a:prstGeom prst="rect">
             <a:avLst/>
@@ -4073,16 +4199,20 @@
           <a:noFill/>
         </p:spPr>
         <p:txBody>
-          <a:bodyPr wrap="none">
-            <a:spAutoFit/>
+          <a:bodyPr wrap="square">
+            <a:noAutofit/>
           </a:bodyPr>
           <a:lstStyle/>
           <a:p>
             <a:pPr>
-              <a:defRPr sz="3200" b="1">
+              <a:lnSpc>
+                <a:spcPts val="2200"/>
+              </a:lnSpc>
+              <a:defRPr sz="2800" b="1">
                 <a:solidFill>
                   <a:srgbClr val="1A1A2E"/>
                 </a:solidFill>
+                <a:latin typeface="Calibri"/>
               </a:defRPr>
             </a:pPr>
             <a:r>
@@ -4107,8 +4237,8 @@
         </p:blipFill>
         <p:spPr>
           <a:xfrm>
-            <a:off x="548640" y="1234440"/>
-            <a:ext cx="11064240" cy="4389120"/>
+            <a:off x="548640" y="1143000"/>
+            <a:ext cx="8128000" cy="4572000"/>
           </a:xfrm>
           <a:prstGeom prst="rect">
             <a:avLst/>
@@ -4132,16 +4262,20 @@
           <a:noFill/>
         </p:spPr>
         <p:txBody>
-          <a:bodyPr wrap="none">
-            <a:spAutoFit/>
+          <a:bodyPr wrap="square">
+            <a:noAutofit/>
           </a:bodyPr>
           <a:lstStyle/>
           <a:p>
             <a:pPr algn="r">
-              <a:defRPr sz="1000">
+              <a:lnSpc>
+                <a:spcPts val="2200"/>
+              </a:lnSpc>
+              <a:defRPr sz="1000" b="0">
                 <a:solidFill>
                   <a:srgbClr val="666666"/>
                 </a:solidFill>
+                <a:latin typeface="Calibri"/>
               </a:defRPr>
             </a:pPr>
             <a:r>
@@ -4176,8 +4310,8 @@
         </p:nvSpPr>
         <p:spPr>
           <a:xfrm>
-            <a:off x="548640" y="457200"/>
-            <a:ext cx="11064240" cy="731520"/>
+            <a:off x="548640" y="411480"/>
+            <a:ext cx="11064240" cy="777240"/>
           </a:xfrm>
           <a:prstGeom prst="rect">
             <a:avLst/>
@@ -4185,16 +4319,20 @@
           <a:noFill/>
         </p:spPr>
         <p:txBody>
-          <a:bodyPr wrap="none">
-            <a:spAutoFit/>
+          <a:bodyPr wrap="square">
+            <a:noAutofit/>
           </a:bodyPr>
           <a:lstStyle/>
           <a:p>
             <a:pPr>
-              <a:defRPr sz="3200" b="1">
+              <a:lnSpc>
+                <a:spcPts val="2200"/>
+              </a:lnSpc>
+              <a:defRPr sz="2800" b="1">
                 <a:solidFill>
                   <a:srgbClr val="1A1A2E"/>
                 </a:solidFill>
+                <a:latin typeface="Calibri"/>
               </a:defRPr>
             </a:pPr>
             <a:r>
@@ -4211,8 +4349,8 @@
         </p:nvSpPr>
         <p:spPr>
           <a:xfrm>
-            <a:off x="548640" y="1280160"/>
-            <a:ext cx="11064240" cy="4754880"/>
+            <a:off x="548640" y="1234440"/>
+            <a:ext cx="11064240" cy="4937760"/>
           </a:xfrm>
           <a:prstGeom prst="rect">
             <a:avLst/>
@@ -4221,52 +4359,64 @@
         </p:spPr>
         <p:txBody>
           <a:bodyPr wrap="square">
-            <a:spAutoFit/>
+            <a:noAutofit/>
           </a:bodyPr>
           <a:lstStyle/>
           <a:p>
             <a:pPr>
+              <a:lnSpc>
+                <a:spcPts val="2200"/>
+              </a:lnSpc>
               <a:spcAft>
-                <a:spcPts val="800"/>
+                <a:spcPts val="1000"/>
               </a:spcAft>
-              <a:defRPr sz="2000">
+              <a:defRPr sz="2000" b="0">
                 <a:solidFill>
                   <a:srgbClr val="333333"/>
                 </a:solidFill>
+                <a:latin typeface="Calibri"/>
               </a:defRPr>
             </a:pPr>
             <a:r>
-              <a:t>Team labs use branches per feature</a:t>
+              <a:t>• Team labs use branches per feature</a:t>
             </a:r>
           </a:p>
           <a:p>
             <a:pPr>
+              <a:lnSpc>
+                <a:spcPts val="2200"/>
+              </a:lnSpc>
               <a:spcAft>
-                <a:spcPts val="800"/>
+                <a:spcPts val="1000"/>
               </a:spcAft>
-              <a:defRPr sz="2000">
+              <a:defRPr sz="2000" b="0">
                 <a:solidFill>
                   <a:srgbClr val="333333"/>
                 </a:solidFill>
+                <a:latin typeface="Calibri"/>
               </a:defRPr>
             </a:pPr>
             <a:r>
-              <a:t>Conflicts happen when two people edit same lines</a:t>
+              <a:t>• Conflicts happen when two people edit same lines</a:t>
             </a:r>
           </a:p>
           <a:p>
             <a:pPr>
+              <a:lnSpc>
+                <a:spcPts val="2200"/>
+              </a:lnSpc>
               <a:spcAft>
-                <a:spcPts val="800"/>
+                <a:spcPts val="1000"/>
               </a:spcAft>
-              <a:defRPr sz="2000">
+              <a:defRPr sz="2000" b="0">
                 <a:solidFill>
                   <a:srgbClr val="333333"/>
                 </a:solidFill>
+                <a:latin typeface="Calibri"/>
               </a:defRPr>
             </a:pPr>
             <a:r>
-              <a:t>Verification IP may live in submodules</a:t>
+              <a:t>• Verification IP may live in submodules</a:t>
             </a:r>
           </a:p>
         </p:txBody>
@@ -4288,16 +4438,20 @@
           <a:noFill/>
         </p:spPr>
         <p:txBody>
-          <a:bodyPr wrap="none">
-            <a:spAutoFit/>
+          <a:bodyPr wrap="square">
+            <a:noAutofit/>
           </a:bodyPr>
           <a:lstStyle/>
           <a:p>
             <a:pPr algn="r">
-              <a:defRPr sz="1000">
+              <a:lnSpc>
+                <a:spcPts val="2200"/>
+              </a:lnSpc>
+              <a:defRPr sz="1000" b="0">
                 <a:solidFill>
                   <a:srgbClr val="666666"/>
                 </a:solidFill>
+                <a:latin typeface="Calibri"/>
               </a:defRPr>
             </a:pPr>
             <a:r>
@@ -4341,13 +4495,21 @@
           <a:noFill/>
         </p:spPr>
         <p:txBody>
-          <a:bodyPr wrap="none">
-            <a:spAutoFit/>
+          <a:bodyPr wrap="square">
+            <a:noAutofit/>
           </a:bodyPr>
           <a:lstStyle/>
           <a:p>
             <a:pPr algn="ctr">
-              <a:defRPr sz="4000" b="1"/>
+              <a:lnSpc>
+                <a:spcPts val="2200"/>
+              </a:lnSpc>
+              <a:defRPr sz="3600" b="1">
+                <a:solidFill>
+                  <a:srgbClr val="1A1A2E"/>
+                </a:solidFill>
+                <a:latin typeface="Calibri"/>
+              </a:defRPr>
             </a:pPr>
             <a:r>
               <a:t>Core topics</a:t>
@@ -4372,16 +4534,20 @@
           <a:noFill/>
         </p:spPr>
         <p:txBody>
-          <a:bodyPr wrap="none">
-            <a:spAutoFit/>
+          <a:bodyPr wrap="square">
+            <a:noAutofit/>
           </a:bodyPr>
           <a:lstStyle/>
           <a:p>
             <a:pPr algn="r">
-              <a:defRPr sz="1000">
+              <a:lnSpc>
+                <a:spcPts val="2200"/>
+              </a:lnSpc>
+              <a:defRPr sz="1000" b="0">
                 <a:solidFill>
                   <a:srgbClr val="666666"/>
                 </a:solidFill>
+                <a:latin typeface="Calibri"/>
               </a:defRPr>
             </a:pPr>
             <a:r>
@@ -4416,8 +4582,8 @@
         </p:nvSpPr>
         <p:spPr>
           <a:xfrm>
-            <a:off x="548640" y="457200"/>
-            <a:ext cx="11064240" cy="731520"/>
+            <a:off x="548640" y="411480"/>
+            <a:ext cx="11064240" cy="777240"/>
           </a:xfrm>
           <a:prstGeom prst="rect">
             <a:avLst/>
@@ -4425,16 +4591,20 @@
           <a:noFill/>
         </p:spPr>
         <p:txBody>
-          <a:bodyPr wrap="none">
-            <a:spAutoFit/>
+          <a:bodyPr wrap="square">
+            <a:noAutofit/>
           </a:bodyPr>
           <a:lstStyle/>
           <a:p>
             <a:pPr>
-              <a:defRPr sz="3200" b="1">
+              <a:lnSpc>
+                <a:spcPts val="2200"/>
+              </a:lnSpc>
+              <a:defRPr sz="2800" b="1">
                 <a:solidFill>
                   <a:srgbClr val="1A1A2E"/>
                 </a:solidFill>
+                <a:latin typeface="Calibri"/>
               </a:defRPr>
             </a:pPr>
             <a:r>
@@ -4451,22 +4621,33 @@
         </p:nvSpPr>
         <p:spPr>
           <a:xfrm>
-            <a:off x="548640" y="1143000"/>
-            <a:ext cx="11064240" cy="548640"/>
+            <a:off x="548640" y="1051560"/>
+            <a:ext cx="11064240" cy="914400"/>
           </a:xfrm>
           <a:prstGeom prst="rect">
             <a:avLst/>
           </a:prstGeom>
-          <a:noFill/>
-        </p:spPr>
-        <p:txBody>
-          <a:bodyPr wrap="none">
-            <a:spAutoFit/>
+          <a:solidFill>
+            <a:srgbClr val="F4F4F4"/>
+          </a:solidFill>
+        </p:spPr>
+        <p:txBody>
+          <a:bodyPr wrap="square">
+            <a:noAutofit/>
           </a:bodyPr>
           <a:lstStyle/>
           <a:p>
             <a:pPr>
-              <a:defRPr sz="1400">
+              <a:lnSpc>
+                <a:spcPts val="2200"/>
+              </a:lnSpc>
+              <a:spcAft>
+                <a:spcPts val="200"/>
+              </a:spcAft>
+              <a:defRPr sz="2000" b="0">
+                <a:solidFill>
+                  <a:srgbClr val="333333"/>
+                </a:solidFill>
                 <a:latin typeface="Consolas"/>
               </a:defRPr>
             </a:pPr>
@@ -4492,8 +4673,8 @@
         </p:blipFill>
         <p:spPr>
           <a:xfrm>
-            <a:off x="548640" y="1828800"/>
-            <a:ext cx="11064240" cy="3840480"/>
+            <a:off x="548640" y="1965960"/>
+            <a:ext cx="7071358" cy="3977639"/>
           </a:xfrm>
           <a:prstGeom prst="rect">
             <a:avLst/>
@@ -4517,16 +4698,20 @@
           <a:noFill/>
         </p:spPr>
         <p:txBody>
-          <a:bodyPr wrap="none">
-            <a:spAutoFit/>
+          <a:bodyPr wrap="square">
+            <a:noAutofit/>
           </a:bodyPr>
           <a:lstStyle/>
           <a:p>
             <a:pPr algn="r">
-              <a:defRPr sz="1000">
+              <a:lnSpc>
+                <a:spcPts val="2200"/>
+              </a:lnSpc>
+              <a:defRPr sz="1000" b="0">
                 <a:solidFill>
                   <a:srgbClr val="666666"/>
                 </a:solidFill>
+                <a:latin typeface="Calibri"/>
               </a:defRPr>
             </a:pPr>
             <a:r>
@@ -4561,8 +4746,8 @@
         </p:nvSpPr>
         <p:spPr>
           <a:xfrm>
-            <a:off x="548640" y="457200"/>
-            <a:ext cx="11064240" cy="731520"/>
+            <a:off x="548640" y="411480"/>
+            <a:ext cx="11064240" cy="777240"/>
           </a:xfrm>
           <a:prstGeom prst="rect">
             <a:avLst/>
@@ -4570,16 +4755,20 @@
           <a:noFill/>
         </p:spPr>
         <p:txBody>
-          <a:bodyPr wrap="none">
-            <a:spAutoFit/>
+          <a:bodyPr wrap="square">
+            <a:noAutofit/>
           </a:bodyPr>
           <a:lstStyle/>
           <a:p>
             <a:pPr>
-              <a:defRPr sz="3200" b="1">
+              <a:lnSpc>
+                <a:spcPts val="2200"/>
+              </a:lnSpc>
+              <a:defRPr sz="2800" b="1">
                 <a:solidFill>
                   <a:srgbClr val="1A1A2E"/>
                 </a:solidFill>
+                <a:latin typeface="Calibri"/>
               </a:defRPr>
             </a:pPr>
             <a:r>
@@ -4596,7 +4785,7 @@
         </p:nvSpPr>
         <p:spPr>
           <a:xfrm>
-            <a:off x="548640" y="1234440"/>
+            <a:off x="548640" y="1143000"/>
             <a:ext cx="11064240" cy="5029200"/>
           </a:xfrm>
           <a:prstGeom prst="rect">
@@ -4608,12 +4797,18 @@
         </p:spPr>
         <p:txBody>
           <a:bodyPr wrap="square">
-            <a:spAutoFit/>
+            <a:noAutofit/>
           </a:bodyPr>
           <a:lstStyle/>
           <a:p>
             <a:pPr>
-              <a:defRPr sz="1400">
+              <a:lnSpc>
+                <a:spcPts val="2200"/>
+              </a:lnSpc>
+              <a:spcAft>
+                <a:spcPts val="400"/>
+              </a:spcAft>
+              <a:defRPr sz="2000" b="0">
                 <a:solidFill>
                   <a:srgbClr val="333333"/>
                 </a:solidFill>
@@ -4623,7 +4818,22 @@
             <a:r>
               <a:t>git checkout -b feature/lab2</a:t>
             </a:r>
-            <a:br/>
+          </a:p>
+          <a:p>
+            <a:pPr>
+              <a:lnSpc>
+                <a:spcPts val="2200"/>
+              </a:lnSpc>
+              <a:spcAft>
+                <a:spcPts val="400"/>
+              </a:spcAft>
+              <a:defRPr sz="2000" b="0">
+                <a:solidFill>
+                  <a:srgbClr val="333333"/>
+                </a:solidFill>
+                <a:latin typeface="Consolas"/>
+              </a:defRPr>
+            </a:pPr>
             <a:r>
               <a:t>git merge main</a:t>
             </a:r>
@@ -4647,16 +4857,20 @@
           <a:noFill/>
         </p:spPr>
         <p:txBody>
-          <a:bodyPr wrap="none">
-            <a:spAutoFit/>
+          <a:bodyPr wrap="square">
+            <a:noAutofit/>
           </a:bodyPr>
           <a:lstStyle/>
           <a:p>
             <a:pPr algn="r">
-              <a:defRPr sz="1000">
+              <a:lnSpc>
+                <a:spcPts val="2200"/>
+              </a:lnSpc>
+              <a:defRPr sz="1000" b="0">
                 <a:solidFill>
                   <a:srgbClr val="666666"/>
                 </a:solidFill>
+                <a:latin typeface="Calibri"/>
               </a:defRPr>
             </a:pPr>
             <a:r>
@@ -4691,8 +4905,8 @@
         </p:nvSpPr>
         <p:spPr>
           <a:xfrm>
-            <a:off x="548640" y="457200"/>
-            <a:ext cx="11064240" cy="731520"/>
+            <a:off x="548640" y="411480"/>
+            <a:ext cx="11064240" cy="777240"/>
           </a:xfrm>
           <a:prstGeom prst="rect">
             <a:avLst/>
@@ -4700,16 +4914,20 @@
           <a:noFill/>
         </p:spPr>
         <p:txBody>
-          <a:bodyPr wrap="none">
-            <a:spAutoFit/>
+          <a:bodyPr wrap="square">
+            <a:noAutofit/>
           </a:bodyPr>
           <a:lstStyle/>
           <a:p>
             <a:pPr>
-              <a:defRPr sz="3200" b="1">
+              <a:lnSpc>
+                <a:spcPts val="2200"/>
+              </a:lnSpc>
+              <a:defRPr sz="2800" b="1">
                 <a:solidFill>
                   <a:srgbClr val="1A1A2E"/>
                 </a:solidFill>
+                <a:latin typeface="Calibri"/>
               </a:defRPr>
             </a:pPr>
             <a:r>
@@ -4726,22 +4944,33 @@
         </p:nvSpPr>
         <p:spPr>
           <a:xfrm>
-            <a:off x="548640" y="1143000"/>
-            <a:ext cx="11064240" cy="548640"/>
+            <a:off x="548640" y="1051560"/>
+            <a:ext cx="11064240" cy="914400"/>
           </a:xfrm>
           <a:prstGeom prst="rect">
             <a:avLst/>
           </a:prstGeom>
-          <a:noFill/>
-        </p:spPr>
-        <p:txBody>
-          <a:bodyPr wrap="none">
-            <a:spAutoFit/>
+          <a:solidFill>
+            <a:srgbClr val="F4F4F4"/>
+          </a:solidFill>
+        </p:spPr>
+        <p:txBody>
+          <a:bodyPr wrap="square">
+            <a:noAutofit/>
           </a:bodyPr>
           <a:lstStyle/>
           <a:p>
             <a:pPr>
-              <a:defRPr sz="1400">
+              <a:lnSpc>
+                <a:spcPts val="2200"/>
+              </a:lnSpc>
+              <a:spcAft>
+                <a:spcPts val="200"/>
+              </a:spcAft>
+              <a:defRPr sz="2000" b="0">
+                <a:solidFill>
+                  <a:srgbClr val="333333"/>
+                </a:solidFill>
                 <a:latin typeface="Consolas"/>
               </a:defRPr>
             </a:pPr>
@@ -4767,8 +4996,8 @@
         </p:blipFill>
         <p:spPr>
           <a:xfrm>
-            <a:off x="548640" y="1828800"/>
-            <a:ext cx="11064240" cy="3840480"/>
+            <a:off x="548640" y="1965960"/>
+            <a:ext cx="7071358" cy="3977639"/>
           </a:xfrm>
           <a:prstGeom prst="rect">
             <a:avLst/>
@@ -4792,16 +5021,20 @@
           <a:noFill/>
         </p:spPr>
         <p:txBody>
-          <a:bodyPr wrap="none">
-            <a:spAutoFit/>
+          <a:bodyPr wrap="square">
+            <a:noAutofit/>
           </a:bodyPr>
           <a:lstStyle/>
           <a:p>
             <a:pPr algn="r">
-              <a:defRPr sz="1000">
+              <a:lnSpc>
+                <a:spcPts val="2200"/>
+              </a:lnSpc>
+              <a:defRPr sz="1000" b="0">
                 <a:solidFill>
                   <a:srgbClr val="666666"/>
                 </a:solidFill>
+                <a:latin typeface="Calibri"/>
               </a:defRPr>
             </a:pPr>
             <a:r>
